--- a/presentations/05-asm-first-contact/05-asm-first-contact-lab.pptx
+++ b/presentations/05-asm-first-contact/05-asm-first-contact-lab.pptx
@@ -132,7 +132,7 @@
   <p:extLst>
     <p:ext uri="{521415D9-36F7-43E2-AB2F-B90AF26B5E84}">
       <p14:sectionLst xmlns:p14="http://schemas.microsoft.com/office/powerpoint/2010/main">
-        <p14:section name="Opening" id="{0a189b96-9c3d-9ae3-9081-6a8cd7dea975}">
+        <p14:section name="Opening" id="{dfc34045-4fde-7bb5-8ebf-6879686aff54}">
           <p14:sldIdLst>
             <p14:sldId id="256"/>
             <p14:sldId id="257"/>
@@ -141,7 +141,7 @@
             <p14:sldId id="260"/>
           </p14:sldIdLst>
         </p14:section>
-        <p14:section name="Skeleton and hello" id="{7b8b81c1-540f-1813-f065-4a5561d9fa5e}">
+        <p14:section name="Skeleton and hello" id="{50f396c8-ef5f-6700-324d-24b3494de35c}">
           <p14:sldIdLst>
             <p14:sldId id="261"/>
             <p14:sldId id="262"/>
@@ -150,7 +150,7 @@
             <p14:sldId id="265"/>
           </p14:sldIdLst>
         </p14:section>
-        <p14:section name="State and the counter" id="{9c7a72ba-5052-6ee7-0efb-896103ec81bb}">
+        <p14:section name="State and the counter" id="{8dcca0da-9d8a-d6b3-ec1e-61ad272539f8}">
           <p14:sldIdLst>
             <p14:sldId id="266"/>
             <p14:sldId id="267"/>
@@ -160,14 +160,14 @@
             <p14:sldId id="271"/>
           </p14:sldIdLst>
         </p14:section>
-        <p14:section name="Trace by hand" id="{eee9181b-5a6c-57b9-ca0b-f4274e4ca3fb}">
+        <p14:section name="Trace by hand" id="{fbf3b617-b682-1ec9-cac2-ea0077007a56}">
           <p14:sldIdLst>
             <p14:sldId id="272"/>
             <p14:sldId id="273"/>
             <p14:sldId id="274"/>
           </p14:sldIdLst>
         </p14:section>
-        <p14:section name="Three bugs" id="{b3da9c03-3a7c-92bd-8030-68b15fff541f}">
+        <p14:section name="Three bugs" id="{4b792ecf-41b7-0b5d-411c-eb3963df3d65}">
           <p14:sldIdLst>
             <p14:sldId id="275"/>
             <p14:sldId id="276"/>
@@ -177,7 +177,7 @@
             <p14:sldId id="280"/>
           </p14:sldIdLst>
         </p14:section>
-        <p14:section name="Closing" id="{3c20c67c-4cec-15a6-1b26-ccab16676b61}">
+        <p14:section name="Closing" id="{559463cd-f382-dd62-9f93-d3c20dc0a184}">
           <p14:sldIdLst>
             <p14:sldId id="281"/>
           </p14:sldIdLst>
@@ -4949,7 +4949,7 @@
               <a:buNone/>
             </a:pPr>
             <a:r>
-              <a:rPr lang="en-US" sz="1150" dirty="0">
+              <a:rPr lang="en-US" sz="1300" dirty="0">
                 <a:solidFill>
                   <a:srgbClr val="E6EDF2"/>
                 </a:solidFill>
@@ -4959,14 +4959,14 @@
               </a:rPr>
               <a:t>first_update:</a:t>
             </a:r>
-            <a:endParaRPr lang="en-US" sz="1150" dirty="0"/>
+            <a:endParaRPr lang="en-US" sz="1300" dirty="0"/>
           </a:p>
           <a:p>
             <a:pPr indent="0" marL="0">
               <a:buNone/>
             </a:pPr>
             <a:r>
-              <a:rPr lang="en-US" sz="1150" dirty="0">
+              <a:rPr lang="en-US" sz="1300" dirty="0">
                 <a:solidFill>
                   <a:srgbClr val="E6EDF2"/>
                 </a:solidFill>
@@ -4980,7 +4980,7 @@
               <a:buNone/>
             </a:pPr>
             <a:r>
-              <a:rPr lang="en-US" sz="1150" dirty="0">
+              <a:rPr lang="en-US" sz="1300" dirty="0">
                 <a:solidFill>
                   <a:srgbClr val="8FB3A0"/>
                 </a:solidFill>
@@ -4988,16 +4988,16 @@
                 <a:ea typeface="Courier New" pitchFamily="34" charset="-122"/>
                 <a:cs typeface="Courier New" pitchFamily="34" charset="-120"/>
               </a:rPr>
-              <a:t># A leaf function: it calls nothing, so it needs no stack frame.</a:t>
-            </a:r>
-            <a:endParaRPr lang="en-US" sz="1150" dirty="0"/>
+              <a:t># A leaf function: it calls nothing, so it needs no stack</a:t>
+            </a:r>
+            <a:endParaRPr lang="en-US" sz="1300" dirty="0"/>
           </a:p>
           <a:p>
             <a:pPr indent="0" marL="0">
               <a:buNone/>
             </a:pPr>
             <a:r>
-              <a:rPr lang="en-US" sz="1150" dirty="0">
+              <a:rPr lang="en-US" sz="1300" dirty="0">
                 <a:solidFill>
                   <a:srgbClr val="E6EDF2"/>
                 </a:solidFill>
@@ -5005,92 +5005,95 @@
                 <a:ea typeface="Courier New" pitchFamily="34" charset="-122"/>
                 <a:cs typeface="Courier New" pitchFamily="34" charset="-120"/>
               </a:rPr>
-              <a:t>    la   t0, counter           </a:t>
-            </a:r>
+              <a:t>        frame.</a:t>
+            </a:r>
+            <a:endParaRPr lang="en-US" sz="1300" dirty="0"/>
+          </a:p>
+          <a:p>
             <a:pPr indent="0" marL="0">
               <a:buNone/>
             </a:pPr>
             <a:r>
-              <a:rPr lang="en-US" sz="1150" dirty="0">
-                <a:solidFill>
-                  <a:srgbClr val="8FB3A0"/>
+              <a:rPr lang="en-US" sz="1300" dirty="0">
+                <a:solidFill>
+                  <a:srgbClr val="E6EDF2"/>
                 </a:solidFill>
                 <a:latin typeface="Courier New" pitchFamily="34" charset="0"/>
                 <a:ea typeface="Courier New" pitchFamily="34" charset="-122"/>
                 <a:cs typeface="Courier New" pitchFamily="34" charset="-120"/>
               </a:rPr>
-              <a:t># t0 = ADDRESS of counter</a:t>
-            </a:r>
-            <a:endParaRPr lang="en-US" sz="1150" dirty="0"/>
-          </a:p>
-          <a:p>
+              <a:t>    la   t0, counter           </a:t>
+            </a:r>
             <a:pPr indent="0" marL="0">
               <a:buNone/>
             </a:pPr>
             <a:r>
-              <a:rPr lang="en-US" sz="1150" dirty="0">
-                <a:solidFill>
-                  <a:srgbClr val="E6EDF2"/>
+              <a:rPr lang="en-US" sz="1300" dirty="0">
+                <a:solidFill>
+                  <a:srgbClr val="8FB3A0"/>
                 </a:solidFill>
                 <a:latin typeface="Courier New" pitchFamily="34" charset="0"/>
                 <a:ea typeface="Courier New" pitchFamily="34" charset="-122"/>
                 <a:cs typeface="Courier New" pitchFamily="34" charset="-120"/>
               </a:rPr>
-              <a:t>    lw   t1, 0(t0)             </a:t>
-            </a:r>
+              <a:t># t0 = ADDRESS of counter</a:t>
+            </a:r>
+            <a:endParaRPr lang="en-US" sz="1300" dirty="0"/>
+          </a:p>
+          <a:p>
             <a:pPr indent="0" marL="0">
               <a:buNone/>
             </a:pPr>
             <a:r>
-              <a:rPr lang="en-US" sz="1150" dirty="0">
-                <a:solidFill>
-                  <a:srgbClr val="8FB3A0"/>
+              <a:rPr lang="en-US" sz="1300" dirty="0">
+                <a:solidFill>
+                  <a:srgbClr val="E6EDF2"/>
                 </a:solidFill>
                 <a:latin typeface="Courier New" pitchFamily="34" charset="0"/>
                 <a:ea typeface="Courier New" pitchFamily="34" charset="-122"/>
                 <a:cs typeface="Courier New" pitchFamily="34" charset="-120"/>
               </a:rPr>
-              <a:t># t1 = VALUE stored there      (load)</a:t>
-            </a:r>
-            <a:endParaRPr lang="en-US" sz="1150" dirty="0"/>
-          </a:p>
-          <a:p>
+              <a:t>    lw   t1, 0(t0)             </a:t>
+            </a:r>
             <a:pPr indent="0" marL="0">
               <a:buNone/>
             </a:pPr>
             <a:r>
-              <a:rPr lang="en-US" sz="1150" dirty="0">
-                <a:solidFill>
-                  <a:srgbClr val="E6EDF2"/>
+              <a:rPr lang="en-US" sz="1300" dirty="0">
+                <a:solidFill>
+                  <a:srgbClr val="8FB3A0"/>
                 </a:solidFill>
                 <a:latin typeface="Courier New" pitchFamily="34" charset="0"/>
                 <a:ea typeface="Courier New" pitchFamily="34" charset="-122"/>
                 <a:cs typeface="Courier New" pitchFamily="34" charset="-120"/>
               </a:rPr>
-              <a:t>    addi t1, t1, 1             </a:t>
-            </a:r>
+              <a:t># t1 = VALUE stored there     </a:t>
+            </a:r>
+            <a:endParaRPr lang="en-US" sz="1300" dirty="0"/>
+          </a:p>
+          <a:p>
             <a:pPr indent="0" marL="0">
               <a:buNone/>
             </a:pPr>
             <a:r>
-              <a:rPr lang="en-US" sz="1150" dirty="0">
-                <a:solidFill>
-                  <a:srgbClr val="8FB3A0"/>
+              <a:rPr lang="en-US" sz="1300" dirty="0">
+                <a:solidFill>
+                  <a:srgbClr val="E6EDF2"/>
                 </a:solidFill>
                 <a:latin typeface="Courier New" pitchFamily="34" charset="0"/>
                 <a:ea typeface="Courier New" pitchFamily="34" charset="-122"/>
                 <a:cs typeface="Courier New" pitchFamily="34" charset="-120"/>
               </a:rPr>
-              <a:t># one tick per frame           (modify)</a:t>
-            </a:r>
-            <a:endParaRPr lang="en-US" sz="1150" dirty="0"/>
+              <a:t>        (load)</a:t>
+            </a:r>
+            <a:endParaRPr lang="en-US" sz="1300" dirty="0"/>
           </a:p>
           <a:p>
             <a:pPr indent="0" marL="0">
               <a:buNone/>
             </a:pPr>
             <a:r>
-              <a:rPr lang="en-US" sz="1150" dirty="0">
+              <a:rPr lang="en-US" sz="1300" dirty="0">
                 <a:solidFill>
                   <a:srgbClr val="E6EDF2"/>
                 </a:solidFill>
@@ -5098,13 +5101,13 @@
                 <a:ea typeface="Courier New" pitchFamily="34" charset="-122"/>
                 <a:cs typeface="Courier New" pitchFamily="34" charset="-120"/>
               </a:rPr>
-              <a:t>    sw   t1, 0(t0)             </a:t>
+              <a:t>    addi t1, t1, 1             </a:t>
             </a:r>
             <a:pPr indent="0" marL="0">
               <a:buNone/>
             </a:pPr>
             <a:r>
-              <a:rPr lang="en-US" sz="1150" dirty="0">
+              <a:rPr lang="en-US" sz="1300" dirty="0">
                 <a:solidFill>
                   <a:srgbClr val="8FB3A0"/>
                 </a:solidFill>
@@ -5112,16 +5115,16 @@
                 <a:ea typeface="Courier New" pitchFamily="34" charset="-122"/>
                 <a:cs typeface="Courier New" pitchFamily="34" charset="-120"/>
               </a:rPr>
-              <a:t># write it back                (store)</a:t>
-            </a:r>
-            <a:endParaRPr lang="en-US" sz="1150" dirty="0"/>
+              <a:t># one tick per frame          </a:t>
+            </a:r>
+            <a:endParaRPr lang="en-US" sz="1300" dirty="0"/>
           </a:p>
           <a:p>
             <a:pPr indent="0" marL="0">
               <a:buNone/>
             </a:pPr>
             <a:r>
-              <a:rPr lang="en-US" sz="1150" dirty="0">
+              <a:rPr lang="en-US" sz="1300" dirty="0">
                 <a:solidFill>
                   <a:srgbClr val="E6EDF2"/>
                 </a:solidFill>
@@ -5129,9 +5132,74 @@
                 <a:ea typeface="Courier New" pitchFamily="34" charset="-122"/>
                 <a:cs typeface="Courier New" pitchFamily="34" charset="-120"/>
               </a:rPr>
+              <a:t>        (modify)</a:t>
+            </a:r>
+            <a:endParaRPr lang="en-US" sz="1300" dirty="0"/>
+          </a:p>
+          <a:p>
+            <a:pPr indent="0" marL="0">
+              <a:buNone/>
+            </a:pPr>
+            <a:r>
+              <a:rPr lang="en-US" sz="1300" dirty="0">
+                <a:solidFill>
+                  <a:srgbClr val="E6EDF2"/>
+                </a:solidFill>
+                <a:latin typeface="Courier New" pitchFamily="34" charset="0"/>
+                <a:ea typeface="Courier New" pitchFamily="34" charset="-122"/>
+                <a:cs typeface="Courier New" pitchFamily="34" charset="-120"/>
+              </a:rPr>
+              <a:t>    sw   t1, 0(t0)             </a:t>
+            </a:r>
+            <a:pPr indent="0" marL="0">
+              <a:buNone/>
+            </a:pPr>
+            <a:r>
+              <a:rPr lang="en-US" sz="1300" dirty="0">
+                <a:solidFill>
+                  <a:srgbClr val="8FB3A0"/>
+                </a:solidFill>
+                <a:latin typeface="Courier New" pitchFamily="34" charset="0"/>
+                <a:ea typeface="Courier New" pitchFamily="34" charset="-122"/>
+                <a:cs typeface="Courier New" pitchFamily="34" charset="-120"/>
+              </a:rPr>
+              <a:t># write it back               </a:t>
+            </a:r>
+            <a:endParaRPr lang="en-US" sz="1300" dirty="0"/>
+          </a:p>
+          <a:p>
+            <a:pPr indent="0" marL="0">
+              <a:buNone/>
+            </a:pPr>
+            <a:r>
+              <a:rPr lang="en-US" sz="1300" dirty="0">
+                <a:solidFill>
+                  <a:srgbClr val="E6EDF2"/>
+                </a:solidFill>
+                <a:latin typeface="Courier New" pitchFamily="34" charset="0"/>
+                <a:ea typeface="Courier New" pitchFamily="34" charset="-122"/>
+                <a:cs typeface="Courier New" pitchFamily="34" charset="-120"/>
+              </a:rPr>
+              <a:t>        (store)</a:t>
+            </a:r>
+            <a:endParaRPr lang="en-US" sz="1300" dirty="0"/>
+          </a:p>
+          <a:p>
+            <a:pPr indent="0" marL="0">
+              <a:buNone/>
+            </a:pPr>
+            <a:r>
+              <a:rPr lang="en-US" sz="1300" dirty="0">
+                <a:solidFill>
+                  <a:srgbClr val="E6EDF2"/>
+                </a:solidFill>
+                <a:latin typeface="Courier New" pitchFamily="34" charset="0"/>
+                <a:ea typeface="Courier New" pitchFamily="34" charset="-122"/>
+                <a:cs typeface="Courier New" pitchFamily="34" charset="-120"/>
+              </a:rPr>
               <a:t>    ret</a:t>
             </a:r>
-            <a:endParaRPr lang="en-US" sz="1150" dirty="0"/>
+            <a:endParaRPr lang="en-US" sz="1300" dirty="0"/>
           </a:p>
         </p:txBody>
       </p:sp>
